--- a/Tic Tac Toe.pptx
+++ b/Tic Tac Toe.pptx
@@ -204,7 +204,7 @@
           <a:p>
             <a:fld id="{A188DE2E-7947-43A8-8DF3-D2DC82B6742B}" type="datetimeFigureOut">
               <a:rPr lang="fr-FR" smtClean="0"/>
-              <a:t>28/10/2024</a:t>
+              <a:t>30/10/2024</a:t>
             </a:fld>
             <a:endParaRPr lang="fr-FR"/>
           </a:p>
@@ -4753,7 +4753,7 @@
           <a:p>
             <a:fld id="{48A87A34-81AB-432B-8DAE-1953F412C126}" type="datetimeFigureOut">
               <a:rPr lang="en-US" dirty="0"/>
-              <a:t>10/28/2024</a:t>
+              <a:t>10/30/2024</a:t>
             </a:fld>
             <a:endParaRPr lang="en-US" dirty="0"/>
           </a:p>
@@ -5015,7 +5015,7 @@
           <a:p>
             <a:fld id="{48A87A34-81AB-432B-8DAE-1953F412C126}" type="datetimeFigureOut">
               <a:rPr lang="en-US" dirty="0"/>
-              <a:t>10/28/2024</a:t>
+              <a:t>10/30/2024</a:t>
             </a:fld>
             <a:endParaRPr lang="en-US" dirty="0"/>
           </a:p>
@@ -5206,7 +5206,7 @@
           <a:p>
             <a:fld id="{48A87A34-81AB-432B-8DAE-1953F412C126}" type="datetimeFigureOut">
               <a:rPr lang="en-US" dirty="0"/>
-              <a:t>10/28/2024</a:t>
+              <a:t>10/30/2024</a:t>
             </a:fld>
             <a:endParaRPr lang="en-US" dirty="0"/>
           </a:p>
@@ -5464,7 +5464,7 @@
           <a:p>
             <a:fld id="{48A87A34-81AB-432B-8DAE-1953F412C126}" type="datetimeFigureOut">
               <a:rPr lang="en-US" dirty="0"/>
-              <a:t>10/28/2024</a:t>
+              <a:t>10/30/2024</a:t>
             </a:fld>
             <a:endParaRPr lang="en-US" dirty="0"/>
           </a:p>
@@ -5893,7 +5893,7 @@
           <a:p>
             <a:fld id="{48A87A34-81AB-432B-8DAE-1953F412C126}" type="datetimeFigureOut">
               <a:rPr lang="en-US" dirty="0"/>
-              <a:t>10/28/2024</a:t>
+              <a:t>10/30/2024</a:t>
             </a:fld>
             <a:endParaRPr lang="en-US" dirty="0"/>
           </a:p>
@@ -6434,7 +6434,7 @@
           <a:p>
             <a:fld id="{48A87A34-81AB-432B-8DAE-1953F412C126}" type="datetimeFigureOut">
               <a:rPr lang="en-US" dirty="0"/>
-              <a:t>10/28/2024</a:t>
+              <a:t>10/30/2024</a:t>
             </a:fld>
             <a:endParaRPr lang="en-US" dirty="0"/>
           </a:p>
@@ -7149,7 +7149,7 @@
           <a:p>
             <a:fld id="{48A87A34-81AB-432B-8DAE-1953F412C126}" type="datetimeFigureOut">
               <a:rPr lang="en-US" dirty="0"/>
-              <a:t>10/28/2024</a:t>
+              <a:t>10/30/2024</a:t>
             </a:fld>
             <a:endParaRPr lang="en-US" dirty="0"/>
           </a:p>
@@ -7314,7 +7314,7 @@
           <a:p>
             <a:fld id="{48A87A34-81AB-432B-8DAE-1953F412C126}" type="datetimeFigureOut">
               <a:rPr lang="en-US" dirty="0"/>
-              <a:t>10/28/2024</a:t>
+              <a:t>10/30/2024</a:t>
             </a:fld>
             <a:endParaRPr lang="en-US" dirty="0"/>
           </a:p>
@@ -7489,7 +7489,7 @@
           <a:p>
             <a:fld id="{48A87A34-81AB-432B-8DAE-1953F412C126}" type="datetimeFigureOut">
               <a:rPr lang="en-US" dirty="0"/>
-              <a:t>10/28/2024</a:t>
+              <a:t>10/30/2024</a:t>
             </a:fld>
             <a:endParaRPr lang="en-US" dirty="0"/>
           </a:p>
@@ -7654,7 +7654,7 @@
           <a:p>
             <a:fld id="{48A87A34-81AB-432B-8DAE-1953F412C126}" type="datetimeFigureOut">
               <a:rPr lang="en-US" dirty="0"/>
-              <a:t>10/28/2024</a:t>
+              <a:t>10/30/2024</a:t>
             </a:fld>
             <a:endParaRPr lang="en-US" dirty="0"/>
           </a:p>
@@ -7899,7 +7899,7 @@
           <a:p>
             <a:fld id="{48A87A34-81AB-432B-8DAE-1953F412C126}" type="datetimeFigureOut">
               <a:rPr lang="en-US" dirty="0"/>
-              <a:t>10/28/2024</a:t>
+              <a:t>10/30/2024</a:t>
             </a:fld>
             <a:endParaRPr lang="en-US" dirty="0"/>
           </a:p>
@@ -8126,7 +8126,7 @@
           <a:p>
             <a:fld id="{48A87A34-81AB-432B-8DAE-1953F412C126}" type="datetimeFigureOut">
               <a:rPr lang="en-US" dirty="0"/>
-              <a:t>10/28/2024</a:t>
+              <a:t>10/30/2024</a:t>
             </a:fld>
             <a:endParaRPr lang="en-US" dirty="0"/>
           </a:p>
@@ -8502,7 +8502,7 @@
           <a:p>
             <a:fld id="{48A87A34-81AB-432B-8DAE-1953F412C126}" type="datetimeFigureOut">
               <a:rPr lang="en-US" dirty="0"/>
-              <a:t>10/28/2024</a:t>
+              <a:t>10/30/2024</a:t>
             </a:fld>
             <a:endParaRPr lang="en-US" dirty="0"/>
           </a:p>
@@ -8615,7 +8615,7 @@
           <a:p>
             <a:fld id="{48A87A34-81AB-432B-8DAE-1953F412C126}" type="datetimeFigureOut">
               <a:rPr lang="en-US" dirty="0"/>
-              <a:t>10/28/2024</a:t>
+              <a:t>10/30/2024</a:t>
             </a:fld>
             <a:endParaRPr lang="en-US" dirty="0"/>
           </a:p>
@@ -8705,7 +8705,7 @@
           <a:p>
             <a:fld id="{48A87A34-81AB-432B-8DAE-1953F412C126}" type="datetimeFigureOut">
               <a:rPr lang="en-US" dirty="0"/>
-              <a:t>10/28/2024</a:t>
+              <a:t>10/30/2024</a:t>
             </a:fld>
             <a:endParaRPr lang="en-US" dirty="0"/>
           </a:p>
@@ -8949,7 +8949,7 @@
           <a:p>
             <a:fld id="{48A87A34-81AB-432B-8DAE-1953F412C126}" type="datetimeFigureOut">
               <a:rPr lang="en-US" dirty="0"/>
-              <a:t>10/28/2024</a:t>
+              <a:t>10/30/2024</a:t>
             </a:fld>
             <a:endParaRPr lang="en-US" dirty="0"/>
           </a:p>
@@ -9224,7 +9224,7 @@
           <a:p>
             <a:fld id="{48A87A34-81AB-432B-8DAE-1953F412C126}" type="datetimeFigureOut">
               <a:rPr lang="en-US" dirty="0"/>
-              <a:t>10/28/2024</a:t>
+              <a:t>10/30/2024</a:t>
             </a:fld>
             <a:endParaRPr lang="en-US" dirty="0"/>
           </a:p>
@@ -12287,7 +12287,7 @@
             <a:fld id="{48A87A34-81AB-432B-8DAE-1953F412C126}" type="datetimeFigureOut">
               <a:rPr lang="en-US" dirty="0"/>
               <a:pPr/>
-              <a:t>10/28/2024</a:t>
+              <a:t>10/30/2024</a:t>
             </a:fld>
             <a:endParaRPr lang="en-US" dirty="0"/>
           </a:p>
@@ -13405,188 +13405,6 @@
   <p:clrMapOvr>
     <a:masterClrMapping/>
   </p:clrMapOvr>
-  <p:timing>
-    <p:tnLst>
-      <p:par>
-        <p:cTn id="1" dur="indefinite" restart="never" nodeType="tmRoot">
-          <p:childTnLst>
-            <p:seq concurrent="1" nextAc="seek">
-              <p:cTn id="2" dur="indefinite" nodeType="mainSeq">
-                <p:childTnLst>
-                  <p:par>
-                    <p:cTn id="3" fill="hold">
-                      <p:stCondLst>
-                        <p:cond delay="indefinite"/>
-                      </p:stCondLst>
-                      <p:childTnLst>
-                        <p:par>
-                          <p:cTn id="4" fill="hold">
-                            <p:stCondLst>
-                              <p:cond delay="0"/>
-                            </p:stCondLst>
-                            <p:childTnLst>
-                              <p:par>
-                                <p:cTn id="5" presetID="1" presetClass="entr" presetSubtype="0" fill="hold" grpId="0" nodeType="clickEffect">
-                                  <p:stCondLst>
-                                    <p:cond delay="0"/>
-                                  </p:stCondLst>
-                                  <p:childTnLst>
-                                    <p:set>
-                                      <p:cBhvr>
-                                        <p:cTn id="6" dur="1" fill="hold">
-                                          <p:stCondLst>
-                                            <p:cond delay="0"/>
-                                          </p:stCondLst>
-                                        </p:cTn>
-                                        <p:tgtEl>
-                                          <p:spTgt spid="3">
-                                            <p:txEl>
-                                              <p:pRg st="0" end="0"/>
-                                            </p:txEl>
-                                          </p:spTgt>
-                                        </p:tgtEl>
-                                        <p:attrNameLst>
-                                          <p:attrName>style.visibility</p:attrName>
-                                        </p:attrNameLst>
-                                      </p:cBhvr>
-                                      <p:to>
-                                        <p:strVal val="visible"/>
-                                      </p:to>
-                                    </p:set>
-                                  </p:childTnLst>
-                                </p:cTn>
-                              </p:par>
-                            </p:childTnLst>
-                          </p:cTn>
-                        </p:par>
-                      </p:childTnLst>
-                    </p:cTn>
-                  </p:par>
-                  <p:par>
-                    <p:cTn id="7" fill="hold">
-                      <p:stCondLst>
-                        <p:cond delay="indefinite"/>
-                      </p:stCondLst>
-                      <p:childTnLst>
-                        <p:par>
-                          <p:cTn id="8" fill="hold">
-                            <p:stCondLst>
-                              <p:cond delay="0"/>
-                            </p:stCondLst>
-                            <p:childTnLst>
-                              <p:par>
-                                <p:cTn id="9" presetID="1" presetClass="entr" presetSubtype="0" fill="hold" grpId="0" nodeType="clickEffect">
-                                  <p:stCondLst>
-                                    <p:cond delay="0"/>
-                                  </p:stCondLst>
-                                  <p:childTnLst>
-                                    <p:set>
-                                      <p:cBhvr>
-                                        <p:cTn id="10" dur="1" fill="hold">
-                                          <p:stCondLst>
-                                            <p:cond delay="0"/>
-                                          </p:stCondLst>
-                                        </p:cTn>
-                                        <p:tgtEl>
-                                          <p:spTgt spid="6">
-                                            <p:txEl>
-                                              <p:pRg st="0" end="0"/>
-                                            </p:txEl>
-                                          </p:spTgt>
-                                        </p:tgtEl>
-                                        <p:attrNameLst>
-                                          <p:attrName>style.visibility</p:attrName>
-                                        </p:attrNameLst>
-                                      </p:cBhvr>
-                                      <p:to>
-                                        <p:strVal val="visible"/>
-                                      </p:to>
-                                    </p:set>
-                                  </p:childTnLst>
-                                </p:cTn>
-                              </p:par>
-                            </p:childTnLst>
-                          </p:cTn>
-                        </p:par>
-                      </p:childTnLst>
-                    </p:cTn>
-                  </p:par>
-                  <p:par>
-                    <p:cTn id="11" fill="hold">
-                      <p:stCondLst>
-                        <p:cond delay="indefinite"/>
-                      </p:stCondLst>
-                      <p:childTnLst>
-                        <p:par>
-                          <p:cTn id="12" fill="hold">
-                            <p:stCondLst>
-                              <p:cond delay="0"/>
-                            </p:stCondLst>
-                            <p:childTnLst>
-                              <p:par>
-                                <p:cTn id="13" presetID="1" presetClass="entr" presetSubtype="0" fill="hold" grpId="0" nodeType="clickEffect">
-                                  <p:stCondLst>
-                                    <p:cond delay="0"/>
-                                  </p:stCondLst>
-                                  <p:childTnLst>
-                                    <p:set>
-                                      <p:cBhvr>
-                                        <p:cTn id="14" dur="1" fill="hold">
-                                          <p:stCondLst>
-                                            <p:cond delay="0"/>
-                                          </p:stCondLst>
-                                        </p:cTn>
-                                        <p:tgtEl>
-                                          <p:spTgt spid="7">
-                                            <p:txEl>
-                                              <p:pRg st="0" end="0"/>
-                                            </p:txEl>
-                                          </p:spTgt>
-                                        </p:tgtEl>
-                                        <p:attrNameLst>
-                                          <p:attrName>style.visibility</p:attrName>
-                                        </p:attrNameLst>
-                                      </p:cBhvr>
-                                      <p:to>
-                                        <p:strVal val="visible"/>
-                                      </p:to>
-                                    </p:set>
-                                  </p:childTnLst>
-                                </p:cTn>
-                              </p:par>
-                            </p:childTnLst>
-                          </p:cTn>
-                        </p:par>
-                      </p:childTnLst>
-                    </p:cTn>
-                  </p:par>
-                </p:childTnLst>
-              </p:cTn>
-              <p:prevCondLst>
-                <p:cond evt="onPrev" delay="0">
-                  <p:tgtEl>
-                    <p:sldTgt/>
-                  </p:tgtEl>
-                </p:cond>
-              </p:prevCondLst>
-              <p:nextCondLst>
-                <p:cond evt="onNext" delay="0">
-                  <p:tgtEl>
-                    <p:sldTgt/>
-                  </p:tgtEl>
-                </p:cond>
-              </p:nextCondLst>
-            </p:seq>
-          </p:childTnLst>
-        </p:cTn>
-      </p:par>
-    </p:tnLst>
-    <p:bldLst>
-      <p:bldP spid="3" grpId="0" build="p"/>
-      <p:bldP spid="6" grpId="0" build="p"/>
-      <p:bldP spid="7" grpId="0" build="p"/>
-    </p:bldLst>
-  </p:timing>
 </p:sld>
 </file>
 
@@ -13986,16 +13804,20 @@
             <p:ph type="title"/>
           </p:nvPr>
         </p:nvSpPr>
-        <p:spPr/>
+        <p:spPr>
+          <a:xfrm>
+            <a:off x="2379335" y="690431"/>
+            <a:ext cx="5719575" cy="926353"/>
+          </a:xfrm>
+        </p:spPr>
         <p:txBody>
           <a:bodyPr/>
           <a:lstStyle/>
           <a:p>
             <a:r>
-              <a:rPr lang="fr-FR"/>
+              <a:rPr lang="fr-FR" dirty="0"/>
               <a:t>Répartition des tâches</a:t>
             </a:r>
-            <a:endParaRPr lang="fr-FR" dirty="0"/>
           </a:p>
         </p:txBody>
       </p:sp>
@@ -14015,7 +13837,12 @@
             <p:ph type="body" idx="1"/>
           </p:nvPr>
         </p:nvSpPr>
-        <p:spPr/>
+        <p:spPr>
+          <a:xfrm>
+            <a:off x="879134" y="2053725"/>
+            <a:ext cx="3196899" cy="685800"/>
+          </a:xfrm>
+        </p:spPr>
         <p:txBody>
           <a:bodyPr/>
           <a:lstStyle/>
@@ -14045,7 +13872,7 @@
         </p:nvSpPr>
         <p:spPr>
           <a:xfrm>
-            <a:off x="1129574" y="4118475"/>
+            <a:off x="879134" y="3121096"/>
             <a:ext cx="1947996" cy="1088146"/>
           </a:xfrm>
         </p:spPr>
@@ -14084,13 +13911,18 @@
             <p:ph type="body" sz="quarter" idx="3"/>
           </p:nvPr>
         </p:nvSpPr>
-        <p:spPr/>
+        <p:spPr>
+          <a:xfrm>
+            <a:off x="3907131" y="2106195"/>
+            <a:ext cx="2088773" cy="633330"/>
+          </a:xfrm>
+        </p:spPr>
         <p:txBody>
           <a:bodyPr/>
           <a:lstStyle/>
           <a:p>
             <a:r>
-              <a:rPr lang="fr-FR"/>
+              <a:rPr lang="fr-FR" dirty="0" err="1"/>
               <a:t>mEHMET</a:t>
             </a:r>
             <a:endParaRPr lang="fr-FR" dirty="0"/>
@@ -14115,8 +13947,8 @@
         </p:nvSpPr>
         <p:spPr>
           <a:xfrm>
-            <a:off x="4514766" y="4118475"/>
-            <a:ext cx="3195830" cy="2430936"/>
+            <a:off x="3907131" y="3121096"/>
+            <a:ext cx="2340246" cy="1230466"/>
           </a:xfrm>
         </p:spPr>
         <p:txBody>
@@ -14154,13 +13986,18 @@
             <p:ph type="body" sz="quarter" idx="13"/>
           </p:nvPr>
         </p:nvSpPr>
-        <p:spPr/>
+        <p:spPr>
+          <a:xfrm>
+            <a:off x="7023340" y="2079960"/>
+            <a:ext cx="3194968" cy="685800"/>
+          </a:xfrm>
+        </p:spPr>
         <p:txBody>
           <a:bodyPr/>
           <a:lstStyle/>
           <a:p>
             <a:r>
-              <a:rPr lang="fr-FR"/>
+              <a:rPr lang="fr-FR" dirty="0" err="1"/>
               <a:t>yoel</a:t>
             </a:r>
             <a:endParaRPr lang="fr-FR" dirty="0"/>
@@ -14185,8 +14022,8 @@
         </p:nvSpPr>
         <p:spPr>
           <a:xfrm>
-            <a:off x="7852442" y="4124612"/>
-            <a:ext cx="3194968" cy="2430936"/>
+            <a:off x="7023340" y="3121096"/>
+            <a:ext cx="2340246" cy="1547059"/>
           </a:xfrm>
         </p:spPr>
         <p:txBody>
@@ -14242,8 +14079,128 @@
         </p:blipFill>
         <p:spPr>
           <a:xfrm>
-            <a:off x="8378222" y="622205"/>
+            <a:off x="8204904" y="132134"/>
             <a:ext cx="1516380" cy="1516380"/>
+          </a:xfrm>
+          <a:prstGeom prst="rect">
+            <a:avLst/>
+          </a:prstGeom>
+        </p:spPr>
+      </p:pic>
+      <p:pic>
+        <p:nvPicPr>
+          <p:cNvPr id="5" name="Image 4">
+            <a:extLst>
+              <a:ext uri="{FF2B5EF4-FFF2-40B4-BE49-F238E27FC236}">
+                <a16:creationId xmlns:a16="http://schemas.microsoft.com/office/drawing/2014/main" id="{56DD9673-16F8-4C86-5ED3-1C628620D15D}"/>
+              </a:ext>
+            </a:extLst>
+          </p:cNvPr>
+          <p:cNvPicPr>
+            <a:picLocks noChangeAspect="1"/>
+          </p:cNvPicPr>
+          <p:nvPr/>
+        </p:nvPicPr>
+        <p:blipFill>
+          <a:blip r:embed="rId4"/>
+          <a:stretch>
+            <a:fillRect/>
+          </a:stretch>
+        </p:blipFill>
+        <p:spPr>
+          <a:xfrm>
+            <a:off x="879134" y="4577598"/>
+            <a:ext cx="2452929" cy="1145324"/>
+          </a:xfrm>
+          <a:prstGeom prst="rect">
+            <a:avLst/>
+          </a:prstGeom>
+        </p:spPr>
+      </p:pic>
+      <p:pic>
+        <p:nvPicPr>
+          <p:cNvPr id="7" name="Image 6">
+            <a:extLst>
+              <a:ext uri="{FF2B5EF4-FFF2-40B4-BE49-F238E27FC236}">
+                <a16:creationId xmlns:a16="http://schemas.microsoft.com/office/drawing/2014/main" id="{808A7B21-FF2B-4452-94D4-8FC7BE066ACB}"/>
+              </a:ext>
+            </a:extLst>
+          </p:cNvPr>
+          <p:cNvPicPr>
+            <a:picLocks noChangeAspect="1"/>
+          </p:cNvPicPr>
+          <p:nvPr/>
+        </p:nvPicPr>
+        <p:blipFill>
+          <a:blip r:embed="rId5"/>
+          <a:stretch>
+            <a:fillRect/>
+          </a:stretch>
+        </p:blipFill>
+        <p:spPr>
+          <a:xfrm>
+            <a:off x="3907131" y="4577598"/>
+            <a:ext cx="2554029" cy="2084673"/>
+          </a:xfrm>
+          <a:prstGeom prst="rect">
+            <a:avLst/>
+          </a:prstGeom>
+        </p:spPr>
+      </p:pic>
+      <p:pic>
+        <p:nvPicPr>
+          <p:cNvPr id="9" name="Image 8">
+            <a:extLst>
+              <a:ext uri="{FF2B5EF4-FFF2-40B4-BE49-F238E27FC236}">
+                <a16:creationId xmlns:a16="http://schemas.microsoft.com/office/drawing/2014/main" id="{80B44349-1409-DF58-2FC5-B3CC0A39A75F}"/>
+              </a:ext>
+            </a:extLst>
+          </p:cNvPr>
+          <p:cNvPicPr>
+            <a:picLocks noChangeAspect="1"/>
+          </p:cNvPicPr>
+          <p:nvPr/>
+        </p:nvPicPr>
+        <p:blipFill>
+          <a:blip r:embed="rId6"/>
+          <a:stretch>
+            <a:fillRect/>
+          </a:stretch>
+        </p:blipFill>
+        <p:spPr>
+          <a:xfrm>
+            <a:off x="7023340" y="4577598"/>
+            <a:ext cx="3782389" cy="482698"/>
+          </a:xfrm>
+          <a:prstGeom prst="rect">
+            <a:avLst/>
+          </a:prstGeom>
+        </p:spPr>
+      </p:pic>
+      <p:pic>
+        <p:nvPicPr>
+          <p:cNvPr id="11" name="Image 10">
+            <a:extLst>
+              <a:ext uri="{FF2B5EF4-FFF2-40B4-BE49-F238E27FC236}">
+                <a16:creationId xmlns:a16="http://schemas.microsoft.com/office/drawing/2014/main" id="{4690F282-74D6-191B-9C1C-CEE30D513364}"/>
+              </a:ext>
+            </a:extLst>
+          </p:cNvPr>
+          <p:cNvPicPr>
+            <a:picLocks noChangeAspect="1"/>
+          </p:cNvPicPr>
+          <p:nvPr/>
+        </p:nvPicPr>
+        <p:blipFill>
+          <a:blip r:embed="rId7"/>
+          <a:stretch>
+            <a:fillRect/>
+          </a:stretch>
+        </p:blipFill>
+        <p:spPr>
+          <a:xfrm>
+            <a:off x="7023339" y="5308560"/>
+            <a:ext cx="3782389" cy="996711"/>
           </a:xfrm>
           <a:prstGeom prst="rect">
             <a:avLst/>
@@ -14260,326 +14217,6 @@
   <p:clrMapOvr>
     <a:masterClrMapping/>
   </p:clrMapOvr>
-  <p:timing>
-    <p:tnLst>
-      <p:par>
-        <p:cTn id="1" dur="indefinite" restart="never" nodeType="tmRoot">
-          <p:childTnLst>
-            <p:seq concurrent="1" nextAc="seek">
-              <p:cTn id="2" dur="indefinite" nodeType="mainSeq">
-                <p:childTnLst>
-                  <p:par>
-                    <p:cTn id="3" fill="hold">
-                      <p:stCondLst>
-                        <p:cond delay="indefinite"/>
-                      </p:stCondLst>
-                      <p:childTnLst>
-                        <p:par>
-                          <p:cTn id="4" fill="hold">
-                            <p:stCondLst>
-                              <p:cond delay="0"/>
-                            </p:stCondLst>
-                            <p:childTnLst>
-                              <p:par>
-                                <p:cTn id="5" presetID="1" presetClass="entr" presetSubtype="0" fill="hold" grpId="0" nodeType="clickEffect">
-                                  <p:stCondLst>
-                                    <p:cond delay="0"/>
-                                  </p:stCondLst>
-                                  <p:childTnLst>
-                                    <p:set>
-                                      <p:cBhvr>
-                                        <p:cTn id="6" dur="1" fill="hold">
-                                          <p:stCondLst>
-                                            <p:cond delay="0"/>
-                                          </p:stCondLst>
-                                        </p:cTn>
-                                        <p:tgtEl>
-                                          <p:spTgt spid="14">
-                                            <p:txEl>
-                                              <p:pRg st="0" end="0"/>
-                                            </p:txEl>
-                                          </p:spTgt>
-                                        </p:tgtEl>
-                                        <p:attrNameLst>
-                                          <p:attrName>style.visibility</p:attrName>
-                                        </p:attrNameLst>
-                                      </p:cBhvr>
-                                      <p:to>
-                                        <p:strVal val="visible"/>
-                                      </p:to>
-                                    </p:set>
-                                  </p:childTnLst>
-                                </p:cTn>
-                              </p:par>
-                            </p:childTnLst>
-                          </p:cTn>
-                        </p:par>
-                      </p:childTnLst>
-                    </p:cTn>
-                  </p:par>
-                  <p:par>
-                    <p:cTn id="7" fill="hold">
-                      <p:stCondLst>
-                        <p:cond delay="indefinite"/>
-                      </p:stCondLst>
-                      <p:childTnLst>
-                        <p:par>
-                          <p:cTn id="8" fill="hold">
-                            <p:stCondLst>
-                              <p:cond delay="0"/>
-                            </p:stCondLst>
-                            <p:childTnLst>
-                              <p:par>
-                                <p:cTn id="9" presetID="1" presetClass="entr" presetSubtype="0" fill="hold" grpId="0" nodeType="clickEffect">
-                                  <p:stCondLst>
-                                    <p:cond delay="0"/>
-                                  </p:stCondLst>
-                                  <p:childTnLst>
-                                    <p:set>
-                                      <p:cBhvr>
-                                        <p:cTn id="10" dur="1" fill="hold">
-                                          <p:stCondLst>
-                                            <p:cond delay="0"/>
-                                          </p:stCondLst>
-                                        </p:cTn>
-                                        <p:tgtEl>
-                                          <p:spTgt spid="17"/>
-                                        </p:tgtEl>
-                                        <p:attrNameLst>
-                                          <p:attrName>style.visibility</p:attrName>
-                                        </p:attrNameLst>
-                                      </p:cBhvr>
-                                      <p:to>
-                                        <p:strVal val="visible"/>
-                                      </p:to>
-                                    </p:set>
-                                  </p:childTnLst>
-                                </p:cTn>
-                              </p:par>
-                            </p:childTnLst>
-                          </p:cTn>
-                        </p:par>
-                      </p:childTnLst>
-                    </p:cTn>
-                  </p:par>
-                  <p:par>
-                    <p:cTn id="11" fill="hold">
-                      <p:stCondLst>
-                        <p:cond delay="indefinite"/>
-                      </p:stCondLst>
-                      <p:childTnLst>
-                        <p:par>
-                          <p:cTn id="12" fill="hold">
-                            <p:stCondLst>
-                              <p:cond delay="0"/>
-                            </p:stCondLst>
-                            <p:childTnLst>
-                              <p:par>
-                                <p:cTn id="13" presetID="1" presetClass="entr" presetSubtype="0" fill="hold" grpId="0" nodeType="clickEffect">
-                                  <p:stCondLst>
-                                    <p:cond delay="0"/>
-                                  </p:stCondLst>
-                                  <p:childTnLst>
-                                    <p:set>
-                                      <p:cBhvr>
-                                        <p:cTn id="14" dur="1" fill="hold">
-                                          <p:stCondLst>
-                                            <p:cond delay="0"/>
-                                          </p:stCondLst>
-                                        </p:cTn>
-                                        <p:tgtEl>
-                                          <p:spTgt spid="15">
-                                            <p:txEl>
-                                              <p:pRg st="0" end="0"/>
-                                            </p:txEl>
-                                          </p:spTgt>
-                                        </p:tgtEl>
-                                        <p:attrNameLst>
-                                          <p:attrName>style.visibility</p:attrName>
-                                        </p:attrNameLst>
-                                      </p:cBhvr>
-                                      <p:to>
-                                        <p:strVal val="visible"/>
-                                      </p:to>
-                                    </p:set>
-                                  </p:childTnLst>
-                                </p:cTn>
-                              </p:par>
-                            </p:childTnLst>
-                          </p:cTn>
-                        </p:par>
-                      </p:childTnLst>
-                    </p:cTn>
-                  </p:par>
-                  <p:par>
-                    <p:cTn id="15" fill="hold">
-                      <p:stCondLst>
-                        <p:cond delay="indefinite"/>
-                      </p:stCondLst>
-                      <p:childTnLst>
-                        <p:par>
-                          <p:cTn id="16" fill="hold">
-                            <p:stCondLst>
-                              <p:cond delay="0"/>
-                            </p:stCondLst>
-                            <p:childTnLst>
-                              <p:par>
-                                <p:cTn id="17" presetID="1" presetClass="entr" presetSubtype="0" fill="hold" grpId="0" nodeType="clickEffect">
-                                  <p:stCondLst>
-                                    <p:cond delay="0"/>
-                                  </p:stCondLst>
-                                  <p:childTnLst>
-                                    <p:set>
-                                      <p:cBhvr>
-                                        <p:cTn id="18" dur="1" fill="hold">
-                                          <p:stCondLst>
-                                            <p:cond delay="0"/>
-                                          </p:stCondLst>
-                                        </p:cTn>
-                                        <p:tgtEl>
-                                          <p:spTgt spid="18"/>
-                                        </p:tgtEl>
-                                        <p:attrNameLst>
-                                          <p:attrName>style.visibility</p:attrName>
-                                        </p:attrNameLst>
-                                      </p:cBhvr>
-                                      <p:to>
-                                        <p:strVal val="visible"/>
-                                      </p:to>
-                                    </p:set>
-                                  </p:childTnLst>
-                                </p:cTn>
-                              </p:par>
-                            </p:childTnLst>
-                          </p:cTn>
-                        </p:par>
-                      </p:childTnLst>
-                    </p:cTn>
-                  </p:par>
-                  <p:par>
-                    <p:cTn id="19" fill="hold">
-                      <p:stCondLst>
-                        <p:cond delay="indefinite"/>
-                      </p:stCondLst>
-                      <p:childTnLst>
-                        <p:par>
-                          <p:cTn id="20" fill="hold">
-                            <p:stCondLst>
-                              <p:cond delay="0"/>
-                            </p:stCondLst>
-                            <p:childTnLst>
-                              <p:par>
-                                <p:cTn id="21" presetID="1" presetClass="entr" presetSubtype="0" fill="hold" grpId="0" nodeType="clickEffect">
-                                  <p:stCondLst>
-                                    <p:cond delay="0"/>
-                                  </p:stCondLst>
-                                  <p:childTnLst>
-                                    <p:set>
-                                      <p:cBhvr>
-                                        <p:cTn id="22" dur="1" fill="hold">
-                                          <p:stCondLst>
-                                            <p:cond delay="0"/>
-                                          </p:stCondLst>
-                                        </p:cTn>
-                                        <p:tgtEl>
-                                          <p:spTgt spid="16">
-                                            <p:txEl>
-                                              <p:pRg st="0" end="0"/>
-                                            </p:txEl>
-                                          </p:spTgt>
-                                        </p:tgtEl>
-                                        <p:attrNameLst>
-                                          <p:attrName>style.visibility</p:attrName>
-                                        </p:attrNameLst>
-                                      </p:cBhvr>
-                                      <p:to>
-                                        <p:strVal val="visible"/>
-                                      </p:to>
-                                    </p:set>
-                                  </p:childTnLst>
-                                </p:cTn>
-                              </p:par>
-                            </p:childTnLst>
-                          </p:cTn>
-                        </p:par>
-                      </p:childTnLst>
-                    </p:cTn>
-                  </p:par>
-                  <p:par>
-                    <p:cTn id="23" fill="hold">
-                      <p:stCondLst>
-                        <p:cond delay="indefinite"/>
-                      </p:stCondLst>
-                      <p:childTnLst>
-                        <p:par>
-                          <p:cTn id="24" fill="hold">
-                            <p:stCondLst>
-                              <p:cond delay="0"/>
-                            </p:stCondLst>
-                            <p:childTnLst>
-                              <p:par>
-                                <p:cTn id="25" presetID="1" presetClass="entr" presetSubtype="0" fill="hold" grpId="0" nodeType="clickEffect">
-                                  <p:stCondLst>
-                                    <p:cond delay="0"/>
-                                  </p:stCondLst>
-                                  <p:childTnLst>
-                                    <p:set>
-                                      <p:cBhvr>
-                                        <p:cTn id="26" dur="1" fill="hold">
-                                          <p:stCondLst>
-                                            <p:cond delay="0"/>
-                                          </p:stCondLst>
-                                        </p:cTn>
-                                        <p:tgtEl>
-                                          <p:spTgt spid="19"/>
-                                        </p:tgtEl>
-                                        <p:attrNameLst>
-                                          <p:attrName>style.visibility</p:attrName>
-                                        </p:attrNameLst>
-                                      </p:cBhvr>
-                                      <p:to>
-                                        <p:strVal val="visible"/>
-                                      </p:to>
-                                    </p:set>
-                                  </p:childTnLst>
-                                </p:cTn>
-                              </p:par>
-                            </p:childTnLst>
-                          </p:cTn>
-                        </p:par>
-                      </p:childTnLst>
-                    </p:cTn>
-                  </p:par>
-                </p:childTnLst>
-              </p:cTn>
-              <p:prevCondLst>
-                <p:cond evt="onPrev" delay="0">
-                  <p:tgtEl>
-                    <p:sldTgt/>
-                  </p:tgtEl>
-                </p:cond>
-              </p:prevCondLst>
-              <p:nextCondLst>
-                <p:cond evt="onNext" delay="0">
-                  <p:tgtEl>
-                    <p:sldTgt/>
-                  </p:tgtEl>
-                </p:cond>
-              </p:nextCondLst>
-            </p:seq>
-          </p:childTnLst>
-        </p:cTn>
-      </p:par>
-    </p:tnLst>
-    <p:bldLst>
-      <p:bldP spid="14" grpId="0" build="p"/>
-      <p:bldP spid="17" grpId="0" uiExpand="1"/>
-      <p:bldP spid="15" grpId="0" build="p"/>
-      <p:bldP spid="18" grpId="0"/>
-      <p:bldP spid="16" grpId="0" build="p"/>
-      <p:bldP spid="19" grpId="0"/>
-    </p:bldLst>
-  </p:timing>
 </p:sld>
 </file>
 
@@ -14624,7 +14261,7 @@
         </p:nvSpPr>
         <p:spPr>
           <a:xfrm>
-            <a:off x="1106856" y="506411"/>
+            <a:off x="879712" y="506411"/>
             <a:ext cx="4486083" cy="1560258"/>
           </a:xfrm>
         </p:spPr>
@@ -14641,19 +14278,17 @@
       </p:sp>
       <p:pic>
         <p:nvPicPr>
-          <p:cNvPr id="6" name="Espace réservé du contenu 5">
+          <p:cNvPr id="12" name="Image 11">
             <a:extLst>
               <a:ext uri="{FF2B5EF4-FFF2-40B4-BE49-F238E27FC236}">
-                <a16:creationId xmlns:a16="http://schemas.microsoft.com/office/drawing/2014/main" id="{1E03507A-DB04-E18A-1B3D-28BFF851F6CC}"/>
+                <a16:creationId xmlns:a16="http://schemas.microsoft.com/office/drawing/2014/main" id="{D7DD2429-1781-E8CD-6E8D-28AA9606B421}"/>
               </a:ext>
             </a:extLst>
           </p:cNvPr>
           <p:cNvPicPr>
-            <a:picLocks noGrp="1" noChangeAspect="1"/>
+            <a:picLocks noChangeAspect="1"/>
           </p:cNvPicPr>
-          <p:nvPr>
-            <p:ph idx="1"/>
-          </p:nvPr>
+          <p:nvPr/>
         </p:nvPicPr>
         <p:blipFill>
           <a:blip r:embed="rId2"/>
@@ -14663,17 +14298,20 @@
         </p:blipFill>
         <p:spPr>
           <a:xfrm>
-            <a:off x="5835225" y="829469"/>
-            <a:ext cx="5128584" cy="5199062"/>
+            <a:off x="1106856" y="2764082"/>
+            <a:ext cx="3043653" cy="2817628"/>
           </a:xfrm>
+          <a:prstGeom prst="rect">
+            <a:avLst/>
+          </a:prstGeom>
         </p:spPr>
       </p:pic>
       <p:pic>
         <p:nvPicPr>
-          <p:cNvPr id="12" name="Image 11">
+          <p:cNvPr id="9" name="Image 8">
             <a:extLst>
               <a:ext uri="{FF2B5EF4-FFF2-40B4-BE49-F238E27FC236}">
-                <a16:creationId xmlns:a16="http://schemas.microsoft.com/office/drawing/2014/main" id="{D7DD2429-1781-E8CD-6E8D-28AA9606B421}"/>
+                <a16:creationId xmlns:a16="http://schemas.microsoft.com/office/drawing/2014/main" id="{4B1784C3-5331-BDD4-1568-36A36E644BEA}"/>
               </a:ext>
             </a:extLst>
           </p:cNvPr>
@@ -14690,12 +14328,41 @@
         </p:blipFill>
         <p:spPr>
           <a:xfrm>
-            <a:off x="1435002" y="2753832"/>
-            <a:ext cx="3043653" cy="2817628"/>
+            <a:off x="5003327" y="4166932"/>
+            <a:ext cx="6390836" cy="1193784"/>
           </a:xfrm>
           <a:prstGeom prst="rect">
             <a:avLst/>
           </a:prstGeom>
+        </p:spPr>
+      </p:pic>
+      <p:pic>
+        <p:nvPicPr>
+          <p:cNvPr id="6" name="Espace réservé du contenu 5">
+            <a:extLst>
+              <a:ext uri="{FF2B5EF4-FFF2-40B4-BE49-F238E27FC236}">
+                <a16:creationId xmlns:a16="http://schemas.microsoft.com/office/drawing/2014/main" id="{51E41A39-A2D6-1D34-99FD-49FC8CD24169}"/>
+              </a:ext>
+            </a:extLst>
+          </p:cNvPr>
+          <p:cNvPicPr>
+            <a:picLocks noGrp="1" noChangeAspect="1"/>
+          </p:cNvPicPr>
+          <p:nvPr>
+            <p:ph idx="1"/>
+          </p:nvPr>
+        </p:nvPicPr>
+        <p:blipFill>
+          <a:blip r:embed="rId4"/>
+          <a:stretch>
+            <a:fillRect/>
+          </a:stretch>
+        </p:blipFill>
+        <p:spPr>
+          <a:xfrm>
+            <a:off x="5003327" y="1560106"/>
+            <a:ext cx="6390836" cy="1606517"/>
+          </a:xfrm>
         </p:spPr>
       </p:pic>
     </p:spTree>
@@ -14915,8 +14582,8 @@
         </p:blipFill>
         <p:spPr>
           <a:xfrm>
-            <a:off x="3306264" y="2231078"/>
-            <a:ext cx="4794760" cy="3600000"/>
+            <a:off x="3160659" y="2083345"/>
+            <a:ext cx="5208722" cy="3910811"/>
           </a:xfrm>
         </p:spPr>
       </p:pic>
